--- a/TSS.pptx
+++ b/TSS.pptx
@@ -113,7 +113,131 @@
       </a:defRPr>
     </a:lvl9pPr>
   </p:defaultTextStyle>
+  <p:extLst>
+    <p:ext uri="{EFAFB233-063F-42B5-8137-9DF3F51BA10A}">
+      <p15:sldGuideLst xmlns:p15="http://schemas.microsoft.com/office/powerpoint/2012/main"/>
+    </p:ext>
+  </p:extLst>
 </p:presentation>
+</file>
+
+<file path=ppt/changesInfos/changesInfo1.xml><?xml version="1.0" encoding="utf-8"?>
+<pc:chgInfo xmlns:a="http://schemas.openxmlformats.org/drawingml/2006/main" xmlns:r="http://schemas.openxmlformats.org/officeDocument/2006/relationships" xmlns:ac="http://schemas.microsoft.com/office/drawing/2013/main/command" xmlns:pc="http://schemas.microsoft.com/office/powerpoint/2013/main/command">
+  <pc:docChgLst>
+    <pc:chgData name="Victor Buscoveanu (PIARO - RO/Bucharest)" userId="face3c1f-56f0-4a08-a51c-83f6ff079d9b" providerId="ADAL" clId="{7F7B0AEF-EF1F-4B39-8018-7D5CF21B4F24}"/>
+    <pc:docChg chg="mod modSld modMainMaster">
+      <pc:chgData name="Victor Buscoveanu (PIARO - RO/Bucharest)" userId="face3c1f-56f0-4a08-a51c-83f6ff079d9b" providerId="ADAL" clId="{7F7B0AEF-EF1F-4B39-8018-7D5CF21B4F24}" dt="2026-04-20T10:40:22.927" v="228" actId="20577"/>
+      <pc:docMkLst>
+        <pc:docMk/>
+      </pc:docMkLst>
+      <pc:sldChg chg="modSp mod">
+        <pc:chgData name="Victor Buscoveanu (PIARO - RO/Bucharest)" userId="face3c1f-56f0-4a08-a51c-83f6ff079d9b" providerId="ADAL" clId="{7F7B0AEF-EF1F-4B39-8018-7D5CF21B4F24}" dt="2026-04-20T10:30:21.164" v="12" actId="20577"/>
+        <pc:sldMkLst>
+          <pc:docMk/>
+          <pc:sldMk cId="4007961434" sldId="257"/>
+        </pc:sldMkLst>
+        <pc:spChg chg="mod">
+          <ac:chgData name="Victor Buscoveanu (PIARO - RO/Bucharest)" userId="face3c1f-56f0-4a08-a51c-83f6ff079d9b" providerId="ADAL" clId="{7F7B0AEF-EF1F-4B39-8018-7D5CF21B4F24}" dt="2026-04-20T10:30:21.164" v="12" actId="20577"/>
+          <ac:spMkLst>
+            <pc:docMk/>
+            <pc:sldMk cId="4007961434" sldId="257"/>
+            <ac:spMk id="3" creationId="{23131874-D2D0-EB4E-A08D-1C6D6FA553D9}"/>
+          </ac:spMkLst>
+        </pc:spChg>
+      </pc:sldChg>
+      <pc:sldChg chg="modSp mod">
+        <pc:chgData name="Victor Buscoveanu (PIARO - RO/Bucharest)" userId="face3c1f-56f0-4a08-a51c-83f6ff079d9b" providerId="ADAL" clId="{7F7B0AEF-EF1F-4B39-8018-7D5CF21B4F24}" dt="2026-04-20T10:31:25.676" v="34" actId="20577"/>
+        <pc:sldMkLst>
+          <pc:docMk/>
+          <pc:sldMk cId="3903858018" sldId="258"/>
+        </pc:sldMkLst>
+        <pc:spChg chg="mod">
+          <ac:chgData name="Victor Buscoveanu (PIARO - RO/Bucharest)" userId="face3c1f-56f0-4a08-a51c-83f6ff079d9b" providerId="ADAL" clId="{7F7B0AEF-EF1F-4B39-8018-7D5CF21B4F24}" dt="2026-04-20T10:31:25.676" v="34" actId="20577"/>
+          <ac:spMkLst>
+            <pc:docMk/>
+            <pc:sldMk cId="3903858018" sldId="258"/>
+            <ac:spMk id="3" creationId="{43F09872-11B0-774B-B22E-CD2268BC12F9}"/>
+          </ac:spMkLst>
+        </pc:spChg>
+      </pc:sldChg>
+      <pc:sldChg chg="modSp mod">
+        <pc:chgData name="Victor Buscoveanu (PIARO - RO/Bucharest)" userId="face3c1f-56f0-4a08-a51c-83f6ff079d9b" providerId="ADAL" clId="{7F7B0AEF-EF1F-4B39-8018-7D5CF21B4F24}" dt="2026-04-20T10:32:04.399" v="45" actId="20577"/>
+        <pc:sldMkLst>
+          <pc:docMk/>
+          <pc:sldMk cId="4148491170" sldId="260"/>
+        </pc:sldMkLst>
+        <pc:spChg chg="mod">
+          <ac:chgData name="Victor Buscoveanu (PIARO - RO/Bucharest)" userId="face3c1f-56f0-4a08-a51c-83f6ff079d9b" providerId="ADAL" clId="{7F7B0AEF-EF1F-4B39-8018-7D5CF21B4F24}" dt="2026-04-20T10:32:04.399" v="45" actId="20577"/>
+          <ac:spMkLst>
+            <pc:docMk/>
+            <pc:sldMk cId="4148491170" sldId="260"/>
+            <ac:spMk id="3" creationId="{8794E524-BBA2-F644-B6D8-00D81CD0A4A7}"/>
+          </ac:spMkLst>
+        </pc:spChg>
+      </pc:sldChg>
+      <pc:sldChg chg="modSp mod">
+        <pc:chgData name="Victor Buscoveanu (PIARO - RO/Bucharest)" userId="face3c1f-56f0-4a08-a51c-83f6ff079d9b" providerId="ADAL" clId="{7F7B0AEF-EF1F-4B39-8018-7D5CF21B4F24}" dt="2026-04-20T10:40:22.927" v="228" actId="20577"/>
+        <pc:sldMkLst>
+          <pc:docMk/>
+          <pc:sldMk cId="1301688414" sldId="261"/>
+        </pc:sldMkLst>
+        <pc:spChg chg="mod">
+          <ac:chgData name="Victor Buscoveanu (PIARO - RO/Bucharest)" userId="face3c1f-56f0-4a08-a51c-83f6ff079d9b" providerId="ADAL" clId="{7F7B0AEF-EF1F-4B39-8018-7D5CF21B4F24}" dt="2026-04-20T10:40:22.927" v="228" actId="20577"/>
+          <ac:spMkLst>
+            <pc:docMk/>
+            <pc:sldMk cId="1301688414" sldId="261"/>
+            <ac:spMk id="3" creationId="{B7BF3525-9443-2045-ADF2-C5399A6A50DC}"/>
+          </ac:spMkLst>
+        </pc:spChg>
+      </pc:sldChg>
+      <pc:sldChg chg="modSp mod">
+        <pc:chgData name="Victor Buscoveanu (PIARO - RO/Bucharest)" userId="face3c1f-56f0-4a08-a51c-83f6ff079d9b" providerId="ADAL" clId="{7F7B0AEF-EF1F-4B39-8018-7D5CF21B4F24}" dt="2026-04-20T10:34:59.858" v="209" actId="20577"/>
+        <pc:sldMkLst>
+          <pc:docMk/>
+          <pc:sldMk cId="796666609" sldId="263"/>
+        </pc:sldMkLst>
+        <pc:spChg chg="mod">
+          <ac:chgData name="Victor Buscoveanu (PIARO - RO/Bucharest)" userId="face3c1f-56f0-4a08-a51c-83f6ff079d9b" providerId="ADAL" clId="{7F7B0AEF-EF1F-4B39-8018-7D5CF21B4F24}" dt="2026-04-20T10:34:59.858" v="209" actId="20577"/>
+          <ac:spMkLst>
+            <pc:docMk/>
+            <pc:sldMk cId="796666609" sldId="263"/>
+            <ac:spMk id="3" creationId="{431A981A-CFA9-4F49-ACA6-1D842AB5CFD1}"/>
+          </ac:spMkLst>
+        </pc:spChg>
+      </pc:sldChg>
+      <pc:sldChg chg="modSp mod">
+        <pc:chgData name="Victor Buscoveanu (PIARO - RO/Bucharest)" userId="face3c1f-56f0-4a08-a51c-83f6ff079d9b" providerId="ADAL" clId="{7F7B0AEF-EF1F-4B39-8018-7D5CF21B4F24}" dt="2026-04-20T10:35:22.412" v="227" actId="20577"/>
+        <pc:sldMkLst>
+          <pc:docMk/>
+          <pc:sldMk cId="997742940" sldId="266"/>
+        </pc:sldMkLst>
+        <pc:spChg chg="mod">
+          <ac:chgData name="Victor Buscoveanu (PIARO - RO/Bucharest)" userId="face3c1f-56f0-4a08-a51c-83f6ff079d9b" providerId="ADAL" clId="{7F7B0AEF-EF1F-4B39-8018-7D5CF21B4F24}" dt="2026-04-20T10:35:22.412" v="227" actId="20577"/>
+          <ac:spMkLst>
+            <pc:docMk/>
+            <pc:sldMk cId="997742940" sldId="266"/>
+            <ac:spMk id="3" creationId="{1122A14E-FEE4-DF43-BFA4-1B49B9E6FF4F}"/>
+          </ac:spMkLst>
+        </pc:spChg>
+      </pc:sldChg>
+      <pc:sldMasterChg chg="addSp mod">
+        <pc:chgData name="Victor Buscoveanu (PIARO - RO/Bucharest)" userId="face3c1f-56f0-4a08-a51c-83f6ff079d9b" providerId="ADAL" clId="{7F7B0AEF-EF1F-4B39-8018-7D5CF21B4F24}" dt="2026-04-20T10:30:25.896" v="13" actId="33475"/>
+        <pc:sldMasterMkLst>
+          <pc:docMk/>
+          <pc:sldMasterMk cId="0" sldId="2147483648"/>
+        </pc:sldMasterMkLst>
+        <pc:spChg chg="add">
+          <ac:chgData name="Victor Buscoveanu (PIARO - RO/Bucharest)" userId="face3c1f-56f0-4a08-a51c-83f6ff079d9b" providerId="ADAL" clId="{7F7B0AEF-EF1F-4B39-8018-7D5CF21B4F24}" dt="2026-04-20T10:30:25.896" v="13" actId="33475"/>
+          <ac:spMkLst>
+            <pc:docMk/>
+            <pc:sldMasterMk cId="0" sldId="2147483648"/>
+            <ac:spMk id="8" creationId="{2384F1C5-7086-43F3-F582-6641E0B734EB}"/>
+          </ac:spMkLst>
+        </pc:spChg>
+      </pc:sldMasterChg>
+    </pc:docChg>
+  </pc:docChgLst>
+</pc:chgInfo>
 </file>
 
 <file path=ppt/slideLayouts/slideLayout1.xml><?xml version="1.0" encoding="utf-8"?>
@@ -286,7 +410,7 @@
             <a:fld id="{87DE6118-2437-4B30-8E3C-4D2BE6020583}" type="datetimeFigureOut">
               <a:rPr lang="en-US" dirty="0"/>
               <a:pPr/>
-              <a:t>4/19/26</a:t>
+              <a:t>4/20/2026</a:t>
             </a:fld>
             <a:endParaRPr lang="en-US" dirty="0"/>
           </a:p>
@@ -430,6 +554,13 @@
               <a:tailEnd/>
             </a:ln>
           </p:spPr>
+          <p:txBody>
+            <a:bodyPr/>
+            <a:lstStyle/>
+            <a:p>
+              <a:endParaRPr lang="en-US"/>
+            </a:p>
+          </p:txBody>
         </p:sp>
         <p:sp>
           <p:nvSpPr>
@@ -488,6 +619,13 @@
               <a:tailEnd/>
             </a:ln>
           </p:spPr>
+          <p:txBody>
+            <a:bodyPr/>
+            <a:lstStyle/>
+            <a:p>
+              <a:endParaRPr lang="en-US"/>
+            </a:p>
+          </p:txBody>
         </p:sp>
       </p:grpSp>
     </p:spTree>
@@ -612,7 +750,7 @@
           <a:p>
             <a:fld id="{87DE6118-2437-4B30-8E3C-4D2BE6020583}" type="datetimeFigureOut">
               <a:rPr lang="en-US" dirty="0"/>
-              <a:t>4/19/26</a:t>
+              <a:t>4/20/2026</a:t>
             </a:fld>
             <a:endParaRPr lang="en-US" dirty="0"/>
           </a:p>
@@ -787,7 +925,7 @@
           <a:p>
             <a:fld id="{87DE6118-2437-4B30-8E3C-4D2BE6020583}" type="datetimeFigureOut">
               <a:rPr lang="en-US" dirty="0"/>
-              <a:t>4/19/26</a:t>
+              <a:t>4/20/2026</a:t>
             </a:fld>
             <a:endParaRPr lang="en-US" dirty="0"/>
           </a:p>
@@ -952,7 +1090,7 @@
           <a:p>
             <a:fld id="{87DE6118-2437-4B30-8E3C-4D2BE6020583}" type="datetimeFigureOut">
               <a:rPr lang="en-US" dirty="0"/>
-              <a:t>4/19/26</a:t>
+              <a:t>4/20/2026</a:t>
             </a:fld>
             <a:endParaRPr lang="en-US" dirty="0"/>
           </a:p>
@@ -1225,7 +1363,7 @@
             <a:fld id="{87DE6118-2437-4B30-8E3C-4D2BE6020583}" type="datetimeFigureOut">
               <a:rPr lang="en-US" dirty="0"/>
               <a:pPr/>
-              <a:t>4/19/26</a:t>
+              <a:t>4/20/2026</a:t>
             </a:fld>
             <a:endParaRPr lang="en-US" dirty="0"/>
           </a:p>
@@ -1615,7 +1753,7 @@
           <a:p>
             <a:fld id="{87DE6118-2437-4B30-8E3C-4D2BE6020583}" type="datetimeFigureOut">
               <a:rPr lang="en-US" dirty="0"/>
-              <a:t>4/19/26</a:t>
+              <a:t>4/20/2026</a:t>
             </a:fld>
             <a:endParaRPr lang="en-US" dirty="0"/>
           </a:p>
@@ -2087,7 +2225,7 @@
           <a:p>
             <a:fld id="{87DE6118-2437-4B30-8E3C-4D2BE6020583}" type="datetimeFigureOut">
               <a:rPr lang="en-US" dirty="0"/>
-              <a:t>4/19/26</a:t>
+              <a:t>4/20/2026</a:t>
             </a:fld>
             <a:endParaRPr lang="en-US" dirty="0"/>
           </a:p>
@@ -2200,7 +2338,7 @@
           <a:p>
             <a:fld id="{87DE6118-2437-4B30-8E3C-4D2BE6020583}" type="datetimeFigureOut">
               <a:rPr lang="en-US" dirty="0"/>
-              <a:t>4/19/26</a:t>
+              <a:t>4/20/2026</a:t>
             </a:fld>
             <a:endParaRPr lang="en-US" dirty="0"/>
           </a:p>
@@ -2290,7 +2428,7 @@
           <a:p>
             <a:fld id="{87DE6118-2437-4B30-8E3C-4D2BE6020583}" type="datetimeFigureOut">
               <a:rPr lang="en-US" dirty="0"/>
-              <a:t>4/19/26</a:t>
+              <a:t>4/20/2026</a:t>
             </a:fld>
             <a:endParaRPr lang="en-US" dirty="0"/>
           </a:p>
@@ -2632,7 +2770,7 @@
             <a:fld id="{87DE6118-2437-4B30-8E3C-4D2BE6020583}" type="datetimeFigureOut">
               <a:rPr lang="en-US" dirty="0"/>
               <a:pPr/>
-              <a:t>4/19/26</a:t>
+              <a:t>4/20/2026</a:t>
             </a:fld>
             <a:endParaRPr lang="en-US" dirty="0"/>
           </a:p>
@@ -3017,7 +3155,7 @@
             <a:fld id="{87DE6118-2437-4B30-8E3C-4D2BE6020583}" type="datetimeFigureOut">
               <a:rPr lang="en-US" dirty="0"/>
               <a:pPr/>
-              <a:t>4/19/26</a:t>
+              <a:t>4/20/2026</a:t>
             </a:fld>
             <a:endParaRPr lang="en-US" dirty="0"/>
           </a:p>
@@ -3292,7 +3430,7 @@
             <a:fld id="{87DE6118-2437-4B30-8E3C-4D2BE6020583}" type="datetimeFigureOut">
               <a:rPr lang="en-US" dirty="0"/>
               <a:pPr/>
-              <a:t>4/19/26</a:t>
+              <a:t>4/20/2026</a:t>
             </a:fld>
             <a:endParaRPr lang="en-US" dirty="0"/>
           </a:p>
@@ -3410,6 +3548,62 @@
             <a:schemeClr val="lt1"/>
           </a:fontRef>
         </p:style>
+        <p:txBody>
+          <a:bodyPr/>
+          <a:lstStyle/>
+          <a:p>
+            <a:endParaRPr lang="en-US"/>
+          </a:p>
+        </p:txBody>
+      </p:sp>
+      <p:sp>
+        <p:nvSpPr>
+          <p:cNvPr id="8" name="TextBox 7">
+            <a:extLst>
+              <a:ext uri="{FF2B5EF4-FFF2-40B4-BE49-F238E27FC236}">
+                <a16:creationId xmlns:a16="http://schemas.microsoft.com/office/drawing/2014/main" id="{2384F1C5-7086-43F3-F582-6641E0B734EB}"/>
+              </a:ext>
+            </a:extLst>
+          </p:cNvPr>
+          <p:cNvSpPr txBox="1"/>
+          <p:nvPr userDrawn="1">
+            <p:extLst>
+              <p:ext uri="{1162E1C5-73C7-4A58-AE30-91384D911F3F}">
+                <p184:classification xmlns:p184="http://schemas.microsoft.com/office/powerpoint/2018/4/main" val="ftr"/>
+              </p:ext>
+            </p:extLst>
+          </p:nvPr>
+        </p:nvSpPr>
+        <p:spPr>
+          <a:xfrm>
+            <a:off x="5925312" y="6672580"/>
+            <a:ext cx="369888" cy="121920"/>
+          </a:xfrm>
+          <a:prstGeom prst="rect">
+            <a:avLst/>
+          </a:prstGeom>
+        </p:spPr>
+        <p:txBody>
+          <a:bodyPr horzOverflow="overflow" lIns="0" tIns="0" rIns="0" bIns="0">
+            <a:spAutoFit/>
+          </a:bodyPr>
+          <a:lstStyle/>
+          <a:p>
+            <a:pPr algn="l"/>
+            <a:r>
+              <a:rPr lang="en-US" sz="800">
+                <a:solidFill>
+                  <a:srgbClr val="000000">
+                    <a:alpha val="50000"/>
+                  </a:srgbClr>
+                </a:solidFill>
+                <a:latin typeface="Arial" panose="020B0604020202020204" pitchFamily="34" charset="0"/>
+                <a:cs typeface="Arial" panose="020B0604020202020204" pitchFamily="34" charset="0"/>
+              </a:rPr>
+              <a:t>Internal</a:t>
+            </a:r>
+          </a:p>
+        </p:txBody>
       </p:sp>
     </p:spTree>
   </p:cSld>
@@ -4479,11 +4673,11 @@
             </a:r>
             <a:r>
               <a:rPr lang="en-US" dirty="0" err="1"/>
-              <a:t>unei</a:t>
-            </a:r>
-            <a:r>
-              <a:rPr lang="en-US" dirty="0"/>
-              <a:t> suite exhaustive de teste </a:t>
+              <a:t>unor</a:t>
+            </a:r>
+            <a:r>
+              <a:rPr lang="en-US" dirty="0"/>
+              <a:t> de teste </a:t>
             </a:r>
             <a:r>
               <a:rPr lang="en-US" dirty="0" err="1"/>
@@ -5285,15 +5479,7 @@
             </a:pPr>
             <a:r>
               <a:rPr lang="en-US" dirty="0"/>
-              <a:t>• </a:t>
-            </a:r>
-            <a:r>
-              <a:rPr lang="en-US" dirty="0" err="1"/>
-              <a:t>Analiza</a:t>
-            </a:r>
-            <a:r>
-              <a:rPr lang="en-US" dirty="0"/>
-              <a:t> </a:t>
+              <a:t>• Analiza </a:t>
             </a:r>
             <a:r>
               <a:rPr lang="en-US" dirty="0" err="1"/>
@@ -5301,15 +5487,7 @@
             </a:r>
             <a:r>
               <a:rPr lang="en-US" dirty="0"/>
-              <a:t> de </a:t>
-            </a:r>
-            <a:r>
-              <a:rPr lang="en-US" dirty="0" err="1"/>
-              <a:t>Frontiera</a:t>
-            </a:r>
-            <a:r>
-              <a:rPr lang="en-US" dirty="0"/>
-              <a:t> (BVA): S-a </a:t>
+              <a:t> de Frontiera (BVA): S-a </a:t>
             </a:r>
             <a:r>
               <a:rPr lang="en-US" dirty="0" err="1"/>
@@ -5357,15 +5535,15 @@
             </a:r>
             <a:r>
               <a:rPr lang="en-US" dirty="0"/>
-              <a:t> fix pe </a:t>
-            </a:r>
-            <a:r>
-              <a:rPr lang="en-US" dirty="0" err="1"/>
-              <a:t>muchie</a:t>
-            </a:r>
-            <a:r>
-              <a:rPr lang="en-US" dirty="0"/>
-              <a:t> (ex: total = 69, 70, 71).</a:t>
+              <a:t> la </a:t>
+            </a:r>
+            <a:r>
+              <a:rPr lang="en-US" dirty="0" err="1"/>
+              <a:t>frontiera</a:t>
+            </a:r>
+            <a:r>
+              <a:rPr lang="en-US" dirty="0"/>
+              <a:t>(ex: total = 69, 70, 71).</a:t>
             </a:r>
           </a:p>
           <a:p>
@@ -5500,7 +5678,7 @@
             </a:r>
             <a:r>
               <a:rPr lang="en-US" dirty="0"/>
-              <a:t> perfecta a </a:t>
+              <a:t> </a:t>
             </a:r>
             <a:r>
               <a:rPr lang="en-US" dirty="0" err="1"/>
@@ -5674,7 +5852,7 @@
             </a:r>
             <a:r>
               <a:rPr lang="en-US" dirty="0" err="1"/>
-              <a:t>valente</a:t>
+              <a:t>cazuri</a:t>
             </a:r>
             <a:r>
               <a:rPr lang="en-US" dirty="0"/>
@@ -5694,15 +5872,7 @@
             </a:r>
             <a:r>
               <a:rPr lang="en-US" dirty="0"/>
-              <a:t> / </a:t>
-            </a:r>
-            <a:r>
-              <a:rPr lang="en-US" dirty="0" err="1"/>
-              <a:t>Fals</a:t>
-            </a:r>
-            <a:r>
-              <a:rPr lang="en-US" dirty="0"/>
-              <a:t>).</a:t>
+              <a:t> / Fals).</a:t>
             </a:r>
           </a:p>
           <a:p>
@@ -5891,15 +6061,7 @@
             </a:pPr>
             <a:r>
               <a:rPr lang="en-US" dirty="0"/>
-              <a:t>• </a:t>
-            </a:r>
-            <a:r>
-              <a:rPr lang="en-US" dirty="0" err="1"/>
-              <a:t>Prin</a:t>
-            </a:r>
-            <a:r>
-              <a:rPr lang="en-US" dirty="0"/>
-              <a:t> Modified Condition/Decision Coverage s-a </a:t>
+              <a:t>• Prin Modified Condition/Decision Coverage s-a </a:t>
             </a:r>
             <a:r>
               <a:rPr lang="en-US" dirty="0" err="1"/>
@@ -5959,14 +6121,6 @@
             </a:r>
             <a:r>
               <a:rPr lang="en-US" dirty="0" err="1"/>
-              <a:t>autonoma</a:t>
-            </a:r>
-            <a:r>
-              <a:rPr lang="en-US" dirty="0"/>
-              <a:t> </a:t>
-            </a:r>
-            <a:r>
-              <a:rPr lang="en-US" dirty="0" err="1"/>
               <a:t>asupra</a:t>
             </a:r>
             <a:r>
@@ -5994,50 +6148,7 @@
             <a:pPr marL="0" indent="0">
               <a:buNone/>
             </a:pPr>
-            <a:r>
-              <a:rPr lang="en-US" dirty="0"/>
-              <a:t>• </a:t>
-            </a:r>
-            <a:r>
-              <a:rPr lang="en-US" dirty="0" err="1"/>
-              <a:t>Testele</a:t>
-            </a:r>
-            <a:r>
-              <a:rPr lang="en-US" dirty="0"/>
-              <a:t> au </a:t>
-            </a:r>
-            <a:r>
-              <a:rPr lang="en-US" dirty="0" err="1"/>
-              <a:t>parcurs</a:t>
-            </a:r>
-            <a:r>
-              <a:rPr lang="en-US" dirty="0"/>
-              <a:t> </a:t>
-            </a:r>
-            <a:r>
-              <a:rPr lang="en-US" dirty="0" err="1"/>
-              <a:t>matricile</a:t>
-            </a:r>
-            <a:r>
-              <a:rPr lang="en-US" dirty="0"/>
-              <a:t> de </a:t>
-            </a:r>
-            <a:r>
-              <a:rPr lang="en-US" dirty="0" err="1"/>
-              <a:t>adevar</a:t>
-            </a:r>
-            <a:r>
-              <a:rPr lang="en-US" dirty="0"/>
-              <a:t> </a:t>
-            </a:r>
-            <a:r>
-              <a:rPr lang="en-US" dirty="0" err="1"/>
-              <a:t>teoretice</a:t>
-            </a:r>
-            <a:r>
-              <a:rPr lang="en-US" dirty="0"/>
-              <a:t>.</a:t>
-            </a:r>
+            <a:endParaRPr lang="en-US" dirty="0"/>
           </a:p>
         </p:txBody>
       </p:sp>
@@ -6524,11 +6635,108 @@
             </a:r>
             <a:r>
               <a:rPr lang="en-US" dirty="0"/>
-              <a:t> "</a:t>
-            </a:r>
-            <a:r>
-              <a:rPr lang="en-US" dirty="0" err="1"/>
-              <a:t>anticorpilor</a:t>
+              <a:t> </a:t>
+            </a:r>
+            <a:r>
+              <a:rPr lang="en-US" dirty="0" err="1"/>
+              <a:t>corectitudinii</a:t>
+            </a:r>
+            <a:r>
+              <a:rPr lang="en-US" dirty="0"/>
+              <a:t> </a:t>
+            </a:r>
+            <a:r>
+              <a:rPr lang="en-US" dirty="0" err="1"/>
+              <a:t>testelor</a:t>
+            </a:r>
+            <a:r>
+              <a:rPr lang="en-US" dirty="0"/>
+              <a:t> </a:t>
+            </a:r>
+            <a:r>
+              <a:rPr lang="en-US" dirty="0" err="1"/>
+              <a:t>noastre</a:t>
+            </a:r>
+            <a:r>
+              <a:rPr lang="en-US" dirty="0"/>
+              <a:t>. A </a:t>
+            </a:r>
+            <a:r>
+              <a:rPr lang="en-US" dirty="0" err="1"/>
+              <a:t>fost</a:t>
+            </a:r>
+            <a:r>
+              <a:rPr lang="en-US" dirty="0"/>
+              <a:t> </a:t>
+            </a:r>
+            <a:r>
+              <a:rPr lang="en-US" dirty="0" err="1"/>
+              <a:t>rulat</a:t>
+            </a:r>
+            <a:r>
+              <a:rPr lang="en-US" dirty="0"/>
+              <a:t> </a:t>
+            </a:r>
+            <a:r>
+              <a:rPr lang="en-US" dirty="0" err="1"/>
+              <a:t>pluginul</a:t>
+            </a:r>
+            <a:r>
+              <a:rPr lang="en-US" dirty="0"/>
+              <a:t> de </a:t>
+            </a:r>
+            <a:r>
+              <a:rPr lang="en-US" dirty="0" err="1"/>
+              <a:t>injectie</a:t>
+            </a:r>
+            <a:r>
+              <a:rPr lang="en-US" dirty="0"/>
+              <a:t> PIT.</a:t>
+            </a:r>
+          </a:p>
+          <a:p>
+            <a:pPr marL="0" indent="0">
+              <a:buNone/>
+            </a:pPr>
+            <a:r>
+              <a:rPr lang="en-US" dirty="0"/>
+              <a:t>• PIT a </a:t>
+            </a:r>
+            <a:r>
+              <a:rPr lang="en-US" dirty="0" err="1"/>
+              <a:t>alterat</a:t>
+            </a:r>
+            <a:r>
+              <a:rPr lang="en-US" dirty="0"/>
+              <a:t> </a:t>
+            </a:r>
+            <a:r>
+              <a:rPr lang="en-US" dirty="0" err="1"/>
+              <a:t>mecanic</a:t>
+            </a:r>
+            <a:r>
+              <a:rPr lang="en-US" dirty="0"/>
+              <a:t> bytecode-ul java (</a:t>
+            </a:r>
+            <a:r>
+              <a:rPr lang="en-US" dirty="0" err="1"/>
+              <a:t>generand</a:t>
+            </a:r>
+            <a:r>
+              <a:rPr lang="en-US" dirty="0"/>
+              <a:t> artificial </a:t>
+            </a:r>
+            <a:r>
+              <a:rPr lang="en-US" dirty="0" err="1"/>
+              <a:t>zeci</a:t>
+            </a:r>
+            <a:r>
+              <a:rPr lang="en-US" dirty="0"/>
+              <a:t> de "</a:t>
+            </a:r>
+            <a:r>
+              <a:rPr lang="en-US" dirty="0" err="1"/>
+              <a:t>mutanti</a:t>
             </a:r>
             <a:r>
               <a:rPr lang="en-US" dirty="0"/>
@@ -6536,19 +6744,68 @@
             </a:r>
             <a:r>
               <a:rPr lang="en-US" dirty="0" err="1"/>
-              <a:t>suitei</a:t>
-            </a:r>
-            <a:r>
-              <a:rPr lang="en-US" dirty="0"/>
-              <a:t> </a:t>
-            </a:r>
-            <a:r>
-              <a:rPr lang="en-US" dirty="0" err="1"/>
-              <a:t>noastre</a:t>
-            </a:r>
-            <a:r>
-              <a:rPr lang="en-US" dirty="0"/>
-              <a:t> de teste. A </a:t>
+              <a:t>ascunsi</a:t>
+            </a:r>
+            <a:r>
+              <a:rPr lang="en-US" dirty="0"/>
+              <a:t>: </a:t>
+            </a:r>
+            <a:r>
+              <a:rPr lang="en-US" dirty="0" err="1"/>
+              <a:t>inversari</a:t>
+            </a:r>
+            <a:r>
+              <a:rPr lang="en-US" dirty="0"/>
+              <a:t> </a:t>
+            </a:r>
+            <a:r>
+              <a:rPr lang="en-US" dirty="0" err="1"/>
+              <a:t>logice</a:t>
+            </a:r>
+            <a:r>
+              <a:rPr lang="en-US" dirty="0"/>
+              <a:t> </a:t>
+            </a:r>
+            <a:r>
+              <a:rPr lang="en-US" dirty="0" err="1"/>
+              <a:t>sau</a:t>
+            </a:r>
+            <a:r>
+              <a:rPr lang="en-US" dirty="0"/>
+              <a:t> </a:t>
+            </a:r>
+            <a:r>
+              <a:rPr lang="en-US" dirty="0" err="1"/>
+              <a:t>numere</a:t>
+            </a:r>
+            <a:r>
+              <a:rPr lang="en-US" dirty="0"/>
+              <a:t> </a:t>
+            </a:r>
+            <a:r>
+              <a:rPr lang="en-US" dirty="0" err="1"/>
+              <a:t>modificate</a:t>
+            </a:r>
+            <a:r>
+              <a:rPr lang="en-US" dirty="0"/>
+              <a:t>).</a:t>
+            </a:r>
+          </a:p>
+          <a:p>
+            <a:pPr marL="0" indent="0">
+              <a:buNone/>
+            </a:pPr>
+            <a:r>
+              <a:rPr lang="en-US" dirty="0"/>
+              <a:t>• </a:t>
+            </a:r>
+            <a:r>
+              <a:rPr lang="en-US" dirty="0" err="1"/>
+              <a:t>Apoi</a:t>
+            </a:r>
+            <a:r>
+              <a:rPr lang="en-US" dirty="0"/>
+              <a:t> au </a:t>
             </a:r>
             <a:r>
               <a:rPr lang="en-US" dirty="0" err="1"/>
@@ -6560,15 +6817,31 @@
             </a:r>
             <a:r>
               <a:rPr lang="en-US" dirty="0" err="1"/>
-              <a:t>rulat</a:t>
-            </a:r>
-            <a:r>
-              <a:rPr lang="en-US" dirty="0"/>
-              <a:t> </a:t>
-            </a:r>
-            <a:r>
-              <a:rPr lang="en-US" dirty="0" err="1"/>
-              <a:t>pluginul</a:t>
+              <a:t>rulate</a:t>
+            </a:r>
+            <a:r>
+              <a:rPr lang="en-US" dirty="0"/>
+              <a:t> </a:t>
+            </a:r>
+            <a:r>
+              <a:rPr lang="en-US" dirty="0" err="1"/>
+              <a:t>cele</a:t>
+            </a:r>
+            <a:r>
+              <a:rPr lang="en-US" dirty="0"/>
+              <a:t> 88 de teste </a:t>
+            </a:r>
+            <a:r>
+              <a:rPr lang="en-US" dirty="0" err="1"/>
+              <a:t>scrise</a:t>
+            </a:r>
+            <a:r>
+              <a:rPr lang="en-US" dirty="0"/>
+              <a:t> </a:t>
+            </a:r>
+            <a:r>
+              <a:rPr lang="en-US" dirty="0" err="1"/>
+              <a:t>chiar</a:t>
             </a:r>
             <a:r>
               <a:rPr lang="en-US" dirty="0"/>
@@ -6576,184 +6849,6 @@
             </a:r>
             <a:r>
               <a:rPr lang="en-US" dirty="0" err="1"/>
-              <a:t>injectie</a:t>
-            </a:r>
-            <a:r>
-              <a:rPr lang="en-US" dirty="0"/>
-              <a:t> PIT.</a:t>
-            </a:r>
-          </a:p>
-          <a:p>
-            <a:pPr marL="0" indent="0">
-              <a:buNone/>
-            </a:pPr>
-            <a:r>
-              <a:rPr lang="en-US" dirty="0"/>
-              <a:t>• PIT a </a:t>
-            </a:r>
-            <a:r>
-              <a:rPr lang="en-US" dirty="0" err="1"/>
-              <a:t>alterat</a:t>
-            </a:r>
-            <a:r>
-              <a:rPr lang="en-US" dirty="0"/>
-              <a:t> </a:t>
-            </a:r>
-            <a:r>
-              <a:rPr lang="en-US" dirty="0" err="1"/>
-              <a:t>mecanic</a:t>
-            </a:r>
-            <a:r>
-              <a:rPr lang="en-US" dirty="0"/>
-              <a:t> bytecode-ul java (</a:t>
-            </a:r>
-            <a:r>
-              <a:rPr lang="en-US" dirty="0" err="1"/>
-              <a:t>generand</a:t>
-            </a:r>
-            <a:r>
-              <a:rPr lang="en-US" dirty="0"/>
-              <a:t> artificial </a:t>
-            </a:r>
-            <a:r>
-              <a:rPr lang="en-US" dirty="0" err="1"/>
-              <a:t>zeci</a:t>
-            </a:r>
-            <a:r>
-              <a:rPr lang="en-US" dirty="0"/>
-              <a:t> de </a:t>
-            </a:r>
-            <a:r>
-              <a:rPr lang="en-US" dirty="0" err="1"/>
-              <a:t>asa</a:t>
-            </a:r>
-            <a:r>
-              <a:rPr lang="en-US" dirty="0"/>
-              <a:t> </a:t>
-            </a:r>
-            <a:r>
-              <a:rPr lang="en-US" dirty="0" err="1"/>
-              <a:t>numiti</a:t>
-            </a:r>
-            <a:r>
-              <a:rPr lang="en-US" dirty="0"/>
-              <a:t> "</a:t>
-            </a:r>
-            <a:r>
-              <a:rPr lang="en-US" dirty="0" err="1"/>
-              <a:t>mutanti</a:t>
-            </a:r>
-            <a:r>
-              <a:rPr lang="en-US" dirty="0"/>
-              <a:t>" </a:t>
-            </a:r>
-            <a:r>
-              <a:rPr lang="en-US" dirty="0" err="1"/>
-              <a:t>ascunsi</a:t>
-            </a:r>
-            <a:r>
-              <a:rPr lang="en-US" dirty="0"/>
-              <a:t>: </a:t>
-            </a:r>
-            <a:r>
-              <a:rPr lang="en-US" dirty="0" err="1"/>
-              <a:t>inversari</a:t>
-            </a:r>
-            <a:r>
-              <a:rPr lang="en-US" dirty="0"/>
-              <a:t> </a:t>
-            </a:r>
-            <a:r>
-              <a:rPr lang="en-US" dirty="0" err="1"/>
-              <a:t>logice</a:t>
-            </a:r>
-            <a:r>
-              <a:rPr lang="en-US" dirty="0"/>
-              <a:t> </a:t>
-            </a:r>
-            <a:r>
-              <a:rPr lang="en-US" dirty="0" err="1"/>
-              <a:t>sau</a:t>
-            </a:r>
-            <a:r>
-              <a:rPr lang="en-US" dirty="0"/>
-              <a:t> </a:t>
-            </a:r>
-            <a:r>
-              <a:rPr lang="en-US" dirty="0" err="1"/>
-              <a:t>numere</a:t>
-            </a:r>
-            <a:r>
-              <a:rPr lang="en-US" dirty="0"/>
-              <a:t> </a:t>
-            </a:r>
-            <a:r>
-              <a:rPr lang="en-US" dirty="0" err="1"/>
-              <a:t>modificate</a:t>
-            </a:r>
-            <a:r>
-              <a:rPr lang="en-US" dirty="0"/>
-              <a:t>).</a:t>
-            </a:r>
-          </a:p>
-          <a:p>
-            <a:pPr marL="0" indent="0">
-              <a:buNone/>
-            </a:pPr>
-            <a:r>
-              <a:rPr lang="en-US" dirty="0"/>
-              <a:t>• </a:t>
-            </a:r>
-            <a:r>
-              <a:rPr lang="en-US" dirty="0" err="1"/>
-              <a:t>Apoi</a:t>
-            </a:r>
-            <a:r>
-              <a:rPr lang="en-US" dirty="0"/>
-              <a:t> au </a:t>
-            </a:r>
-            <a:r>
-              <a:rPr lang="en-US" dirty="0" err="1"/>
-              <a:t>fost</a:t>
-            </a:r>
-            <a:r>
-              <a:rPr lang="en-US" dirty="0"/>
-              <a:t> </a:t>
-            </a:r>
-            <a:r>
-              <a:rPr lang="en-US" dirty="0" err="1"/>
-              <a:t>rulate</a:t>
-            </a:r>
-            <a:r>
-              <a:rPr lang="en-US" dirty="0"/>
-              <a:t> </a:t>
-            </a:r>
-            <a:r>
-              <a:rPr lang="en-US" dirty="0" err="1"/>
-              <a:t>cele</a:t>
-            </a:r>
-            <a:r>
-              <a:rPr lang="en-US" dirty="0"/>
-              <a:t> 88 de teste </a:t>
-            </a:r>
-            <a:r>
-              <a:rPr lang="en-US" dirty="0" err="1"/>
-              <a:t>scrise</a:t>
-            </a:r>
-            <a:r>
-              <a:rPr lang="en-US" dirty="0"/>
-              <a:t> </a:t>
-            </a:r>
-            <a:r>
-              <a:rPr lang="en-US" dirty="0" err="1"/>
-              <a:t>chiar</a:t>
-            </a:r>
-            <a:r>
-              <a:rPr lang="en-US" dirty="0"/>
-              <a:t> de </a:t>
-            </a:r>
-            <a:r>
-              <a:rPr lang="en-US" dirty="0" err="1"/>
               <a:t>noi</a:t>
             </a:r>
             <a:r>
@@ -6786,7 +6881,7 @@
             </a:r>
             <a:r>
               <a:rPr lang="en-US" dirty="0" err="1"/>
-              <a:t>stricat</a:t>
+              <a:t>gresit</a:t>
             </a:r>
             <a:r>
               <a:rPr lang="en-US" dirty="0"/>
@@ -6978,7 +7073,7 @@
             </a:r>
             <a:r>
               <a:rPr lang="en-US" dirty="0" err="1"/>
-              <a:t>Ujici</a:t>
+              <a:t>ucisi</a:t>
             </a:r>
             <a:r>
               <a:rPr lang="en-US" dirty="0"/>

--- a/TSS.pptx
+++ b/TSS.pptx
@@ -14,7 +14,6 @@
     <p:sldId id="262" r:id="rId8"/>
     <p:sldId id="263" r:id="rId9"/>
     <p:sldId id="266" r:id="rId10"/>
-    <p:sldId id="265" r:id="rId11"/>
   </p:sldIdLst>
   <p:sldSz cx="12192000" cy="6858000"/>
   <p:notesSz cx="6858000" cy="9144000"/>
@@ -125,8 +124,8 @@
 <pc:chgInfo xmlns:a="http://schemas.openxmlformats.org/drawingml/2006/main" xmlns:r="http://schemas.openxmlformats.org/officeDocument/2006/relationships" xmlns:ac="http://schemas.microsoft.com/office/drawing/2013/main/command" xmlns:pc="http://schemas.microsoft.com/office/powerpoint/2013/main/command">
   <pc:docChgLst>
     <pc:chgData name="Victor Buscoveanu (PIARO - RO/Bucharest)" userId="face3c1f-56f0-4a08-a51c-83f6ff079d9b" providerId="ADAL" clId="{7F7B0AEF-EF1F-4B39-8018-7D5CF21B4F24}"/>
-    <pc:docChg chg="mod modSld modMainMaster">
-      <pc:chgData name="Victor Buscoveanu (PIARO - RO/Bucharest)" userId="face3c1f-56f0-4a08-a51c-83f6ff079d9b" providerId="ADAL" clId="{7F7B0AEF-EF1F-4B39-8018-7D5CF21B4F24}" dt="2026-04-20T10:40:22.927" v="228" actId="20577"/>
+    <pc:docChg chg="mod delSld modSld modMainMaster">
+      <pc:chgData name="Victor Buscoveanu (PIARO - RO/Bucharest)" userId="face3c1f-56f0-4a08-a51c-83f6ff079d9b" providerId="ADAL" clId="{7F7B0AEF-EF1F-4B39-8018-7D5CF21B4F24}" dt="2026-04-20T11:24:19.853" v="229" actId="47"/>
       <pc:docMkLst>
         <pc:docMk/>
       </pc:docMkLst>
@@ -204,6 +203,13 @@
             <ac:spMk id="3" creationId="{431A981A-CFA9-4F49-ACA6-1D842AB5CFD1}"/>
           </ac:spMkLst>
         </pc:spChg>
+      </pc:sldChg>
+      <pc:sldChg chg="del">
+        <pc:chgData name="Victor Buscoveanu (PIARO - RO/Bucharest)" userId="face3c1f-56f0-4a08-a51c-83f6ff079d9b" providerId="ADAL" clId="{7F7B0AEF-EF1F-4B39-8018-7D5CF21B4F24}" dt="2026-04-20T11:24:19.853" v="229" actId="47"/>
+        <pc:sldMkLst>
+          <pc:docMk/>
+          <pc:sldMk cId="4161517650" sldId="265"/>
+        </pc:sldMkLst>
       </pc:sldChg>
       <pc:sldChg chg="modSp mod">
         <pc:chgData name="Victor Buscoveanu (PIARO - RO/Bucharest)" userId="face3c1f-56f0-4a08-a51c-83f6ff079d9b" providerId="ADAL" clId="{7F7B0AEF-EF1F-4B39-8018-7D5CF21B4F24}" dt="2026-04-20T10:35:22.412" v="227" actId="20577"/>
@@ -4160,408 +4166,6 @@
 </p:sld>
 </file>
 
-<file path=ppt/slides/slide10.xml><?xml version="1.0" encoding="utf-8"?>
-<p:sld xmlns:a="http://schemas.openxmlformats.org/drawingml/2006/main" xmlns:r="http://schemas.openxmlformats.org/officeDocument/2006/relationships" xmlns:p="http://schemas.openxmlformats.org/presentationml/2006/main">
-  <p:cSld>
-    <p:spTree>
-      <p:nvGrpSpPr>
-        <p:cNvPr id="1" name=""/>
-        <p:cNvGrpSpPr/>
-        <p:nvPr/>
-      </p:nvGrpSpPr>
-      <p:grpSpPr>
-        <a:xfrm>
-          <a:off x="0" y="0"/>
-          <a:ext cx="0" cy="0"/>
-          <a:chOff x="0" y="0"/>
-          <a:chExt cx="0" cy="0"/>
-        </a:xfrm>
-      </p:grpSpPr>
-      <p:sp>
-        <p:nvSpPr>
-          <p:cNvPr id="2" name="Title 1">
-            <a:extLst>
-              <a:ext uri="{FF2B5EF4-FFF2-40B4-BE49-F238E27FC236}">
-                <a16:creationId xmlns:a16="http://schemas.microsoft.com/office/drawing/2014/main" id="{357F5CE3-91D3-784A-9E87-47CE9FDFA6F7}"/>
-              </a:ext>
-            </a:extLst>
-          </p:cNvPr>
-          <p:cNvSpPr>
-            <a:spLocks noGrp="1"/>
-          </p:cNvSpPr>
-          <p:nvPr>
-            <p:ph type="title"/>
-          </p:nvPr>
-        </p:nvSpPr>
-        <p:spPr/>
-        <p:txBody>
-          <a:bodyPr/>
-          <a:lstStyle/>
-          <a:p>
-            <a:r>
-              <a:rPr lang="en-US" dirty="0" err="1"/>
-              <a:t>Concluzii</a:t>
-            </a:r>
-            <a:r>
-              <a:rPr lang="en-US" dirty="0"/>
-              <a:t> </a:t>
-            </a:r>
-            <a:r>
-              <a:rPr lang="en-US" dirty="0" err="1"/>
-              <a:t>Tehnice</a:t>
-            </a:r>
-            <a:endParaRPr lang="en-US" dirty="0"/>
-          </a:p>
-        </p:txBody>
-      </p:sp>
-      <p:sp>
-        <p:nvSpPr>
-          <p:cNvPr id="3" name="Content Placeholder 2">
-            <a:extLst>
-              <a:ext uri="{FF2B5EF4-FFF2-40B4-BE49-F238E27FC236}">
-                <a16:creationId xmlns:a16="http://schemas.microsoft.com/office/drawing/2014/main" id="{F08A5E39-520C-3F4A-BFB4-5E031B87BF9B}"/>
-              </a:ext>
-            </a:extLst>
-          </p:cNvPr>
-          <p:cNvSpPr>
-            <a:spLocks noGrp="1"/>
-          </p:cNvSpPr>
-          <p:nvPr>
-            <p:ph idx="1"/>
-          </p:nvPr>
-        </p:nvSpPr>
-        <p:spPr/>
-        <p:txBody>
-          <a:bodyPr/>
-          <a:lstStyle/>
-          <a:p>
-            <a:pPr marL="0" indent="0">
-              <a:buNone/>
-            </a:pPr>
-            <a:r>
-              <a:rPr lang="en-US" dirty="0"/>
-              <a:t>• </a:t>
-            </a:r>
-            <a:r>
-              <a:rPr lang="en-US" dirty="0" err="1"/>
-              <a:t>Aplicatia</a:t>
-            </a:r>
-            <a:r>
-              <a:rPr lang="en-US" dirty="0"/>
-              <a:t> </a:t>
-            </a:r>
-            <a:r>
-              <a:rPr lang="en-US" dirty="0" err="1"/>
-              <a:t>construita</a:t>
-            </a:r>
-            <a:r>
-              <a:rPr lang="en-US" dirty="0"/>
-              <a:t> a </a:t>
-            </a:r>
-            <a:r>
-              <a:rPr lang="en-US" dirty="0" err="1"/>
-              <a:t>bifat</a:t>
-            </a:r>
-            <a:r>
-              <a:rPr lang="en-US" dirty="0"/>
-              <a:t> pe </a:t>
-            </a:r>
-            <a:r>
-              <a:rPr lang="en-US" dirty="0" err="1"/>
-              <a:t>linia</a:t>
-            </a:r>
-            <a:r>
-              <a:rPr lang="en-US" dirty="0"/>
-              <a:t> </a:t>
-            </a:r>
-            <a:r>
-              <a:rPr lang="en-US" dirty="0" err="1"/>
-              <a:t>functionala</a:t>
-            </a:r>
-            <a:r>
-              <a:rPr lang="en-US" dirty="0"/>
-              <a:t> 100% </a:t>
-            </a:r>
-            <a:r>
-              <a:rPr lang="en-US" dirty="0" err="1"/>
-              <a:t>toate</a:t>
-            </a:r>
-            <a:r>
-              <a:rPr lang="en-US" dirty="0"/>
-              <a:t> </a:t>
-            </a:r>
-            <a:r>
-              <a:rPr lang="en-US" dirty="0" err="1"/>
-              <a:t>cerintele</a:t>
-            </a:r>
-            <a:r>
-              <a:rPr lang="en-US" dirty="0"/>
-              <a:t> cu brio, </a:t>
-            </a:r>
-            <a:r>
-              <a:rPr lang="en-US" dirty="0" err="1"/>
-              <a:t>intarindu</a:t>
-            </a:r>
-            <a:r>
-              <a:rPr lang="en-US" dirty="0"/>
-              <a:t>-se anti-</a:t>
-            </a:r>
-            <a:r>
-              <a:rPr lang="en-US" dirty="0" err="1"/>
-              <a:t>fragele</a:t>
-            </a:r>
-            <a:r>
-              <a:rPr lang="en-US" dirty="0"/>
-              <a:t>.</a:t>
-            </a:r>
-          </a:p>
-          <a:p>
-            <a:pPr marL="0" indent="0">
-              <a:buNone/>
-            </a:pPr>
-            <a:r>
-              <a:rPr lang="en-US" dirty="0"/>
-              <a:t>• </a:t>
-            </a:r>
-            <a:r>
-              <a:rPr lang="en-US" dirty="0" err="1"/>
-              <a:t>Combinarea</a:t>
-            </a:r>
-            <a:r>
-              <a:rPr lang="en-US" dirty="0"/>
-              <a:t> </a:t>
-            </a:r>
-            <a:r>
-              <a:rPr lang="en-US" dirty="0" err="1"/>
-              <a:t>mai</a:t>
-            </a:r>
-            <a:r>
-              <a:rPr lang="en-US" dirty="0"/>
-              <a:t> </a:t>
-            </a:r>
-            <a:r>
-              <a:rPr lang="en-US" dirty="0" err="1"/>
-              <a:t>multor</a:t>
-            </a:r>
-            <a:r>
-              <a:rPr lang="en-US" dirty="0"/>
-              <a:t> </a:t>
-            </a:r>
-            <a:r>
-              <a:rPr lang="en-US" dirty="0" err="1"/>
-              <a:t>tipologii</a:t>
-            </a:r>
-            <a:r>
-              <a:rPr lang="en-US" dirty="0"/>
-              <a:t> de </a:t>
-            </a:r>
-            <a:r>
-              <a:rPr lang="en-US" dirty="0" err="1"/>
-              <a:t>generatoare</a:t>
-            </a:r>
-            <a:r>
-              <a:rPr lang="en-US" dirty="0"/>
-              <a:t> de teste (</a:t>
-            </a:r>
-            <a:r>
-              <a:rPr lang="en-US" dirty="0" err="1"/>
-              <a:t>Echivalente</a:t>
-            </a:r>
-            <a:r>
-              <a:rPr lang="en-US" dirty="0"/>
-              <a:t> + Boundary) </a:t>
-            </a:r>
-            <a:r>
-              <a:rPr lang="en-US" dirty="0" err="1"/>
-              <a:t>previne</a:t>
-            </a:r>
-            <a:r>
-              <a:rPr lang="en-US" dirty="0"/>
-              <a:t> </a:t>
-            </a:r>
-            <a:r>
-              <a:rPr lang="en-US" dirty="0" err="1"/>
-              <a:t>aparitia</a:t>
-            </a:r>
-            <a:r>
-              <a:rPr lang="en-US" dirty="0"/>
-              <a:t> </a:t>
-            </a:r>
-            <a:r>
-              <a:rPr lang="en-US" dirty="0" err="1"/>
-              <a:t>efectelor</a:t>
-            </a:r>
-            <a:r>
-              <a:rPr lang="en-US" dirty="0"/>
-              <a:t> de colt in </a:t>
-            </a:r>
-            <a:r>
-              <a:rPr lang="en-US" dirty="0" err="1"/>
-              <a:t>productie</a:t>
-            </a:r>
-            <a:r>
-              <a:rPr lang="en-US" dirty="0"/>
-              <a:t>.</a:t>
-            </a:r>
-          </a:p>
-          <a:p>
-            <a:pPr marL="0" indent="0">
-              <a:buNone/>
-            </a:pPr>
-            <a:r>
-              <a:rPr lang="en-US" dirty="0"/>
-              <a:t>• </a:t>
-            </a:r>
-            <a:r>
-              <a:rPr lang="en-US" dirty="0" err="1"/>
-              <a:t>Utilizarea</a:t>
-            </a:r>
-            <a:r>
-              <a:rPr lang="en-US" dirty="0"/>
-              <a:t> AI a </a:t>
-            </a:r>
-            <a:r>
-              <a:rPr lang="en-US" dirty="0" err="1"/>
-              <a:t>fost</a:t>
-            </a:r>
-            <a:r>
-              <a:rPr lang="en-US" dirty="0"/>
-              <a:t> </a:t>
-            </a:r>
-            <a:r>
-              <a:rPr lang="en-US" dirty="0" err="1"/>
-              <a:t>benefica</a:t>
-            </a:r>
-            <a:r>
-              <a:rPr lang="en-US" dirty="0"/>
-              <a:t> </a:t>
-            </a:r>
-            <a:r>
-              <a:rPr lang="en-US" dirty="0" err="1"/>
-              <a:t>doar</a:t>
-            </a:r>
-            <a:r>
-              <a:rPr lang="en-US" dirty="0"/>
-              <a:t> in zona </a:t>
-            </a:r>
-            <a:r>
-              <a:rPr lang="en-US" dirty="0" err="1"/>
-              <a:t>structurala</a:t>
-            </a:r>
-            <a:r>
-              <a:rPr lang="en-US" dirty="0"/>
-              <a:t> de </a:t>
-            </a:r>
-            <a:r>
-              <a:rPr lang="en-US" dirty="0" err="1"/>
-              <a:t>ideatie</a:t>
-            </a:r>
-            <a:r>
-              <a:rPr lang="en-US" dirty="0"/>
-              <a:t>, </a:t>
-            </a:r>
-            <a:r>
-              <a:rPr lang="en-US" dirty="0" err="1"/>
-              <a:t>insa</a:t>
-            </a:r>
-            <a:r>
-              <a:rPr lang="en-US" dirty="0"/>
-              <a:t> </a:t>
-            </a:r>
-            <a:r>
-              <a:rPr lang="en-US" dirty="0" err="1"/>
-              <a:t>pentru</a:t>
-            </a:r>
-            <a:r>
-              <a:rPr lang="en-US" dirty="0"/>
-              <a:t> </a:t>
-            </a:r>
-            <a:r>
-              <a:rPr lang="en-US" dirty="0" err="1"/>
-              <a:t>intelegerea</a:t>
-            </a:r>
-            <a:r>
-              <a:rPr lang="en-US" dirty="0"/>
-              <a:t> </a:t>
-            </a:r>
-            <a:r>
-              <a:rPr lang="en-US" dirty="0" err="1"/>
-              <a:t>mutatiilor</a:t>
-            </a:r>
-            <a:r>
-              <a:rPr lang="en-US" dirty="0"/>
-              <a:t> </a:t>
-            </a:r>
-            <a:r>
-              <a:rPr lang="en-US" dirty="0" err="1"/>
-              <a:t>echivalente</a:t>
-            </a:r>
-            <a:r>
-              <a:rPr lang="en-US" dirty="0"/>
-              <a:t> </a:t>
-            </a:r>
-            <a:r>
-              <a:rPr lang="en-US" dirty="0" err="1"/>
-              <a:t>analiza</a:t>
-            </a:r>
-            <a:r>
-              <a:rPr lang="en-US" dirty="0"/>
-              <a:t> </a:t>
-            </a:r>
-            <a:r>
-              <a:rPr lang="en-US" dirty="0" err="1"/>
-              <a:t>logica</a:t>
-            </a:r>
-            <a:r>
-              <a:rPr lang="en-US" dirty="0"/>
-              <a:t> </a:t>
-            </a:r>
-            <a:r>
-              <a:rPr lang="en-US" dirty="0" err="1"/>
-              <a:t>umana</a:t>
-            </a:r>
-            <a:r>
-              <a:rPr lang="en-US" dirty="0"/>
-              <a:t> din teste a </a:t>
-            </a:r>
-            <a:r>
-              <a:rPr lang="en-US" dirty="0" err="1"/>
-              <a:t>ramas</a:t>
-            </a:r>
-            <a:r>
-              <a:rPr lang="en-US" dirty="0"/>
-              <a:t> </a:t>
-            </a:r>
-            <a:r>
-              <a:rPr lang="en-US" dirty="0" err="1"/>
-              <a:t>fundamentala</a:t>
-            </a:r>
-            <a:r>
-              <a:rPr lang="en-US" dirty="0"/>
-              <a:t>.</a:t>
-            </a:r>
-          </a:p>
-          <a:p>
-            <a:pPr marL="0" indent="0">
-              <a:buNone/>
-            </a:pPr>
-            <a:endParaRPr lang="en-US" dirty="0"/>
-          </a:p>
-        </p:txBody>
-      </p:sp>
-    </p:spTree>
-    <p:extLst>
-      <p:ext uri="{BB962C8B-B14F-4D97-AF65-F5344CB8AC3E}">
-        <p14:creationId xmlns:p14="http://schemas.microsoft.com/office/powerpoint/2010/main" val="4161517650"/>
-      </p:ext>
-    </p:extLst>
-  </p:cSld>
-  <p:clrMapOvr>
-    <a:masterClrMapping/>
-  </p:clrMapOvr>
-</p:sld>
-</file>
-
 <file path=ppt/slides/slide2.xml><?xml version="1.0" encoding="utf-8"?>
 <p:sld xmlns:a="http://schemas.openxmlformats.org/drawingml/2006/main" xmlns:r="http://schemas.openxmlformats.org/officeDocument/2006/relationships" xmlns:p="http://schemas.openxmlformats.org/presentationml/2006/main">
   <p:cSld>
